--- a/canvas/avc248/slides/week-10-networking-linkedin.pptx
+++ b/canvas/avc248/slides/week-10-networking-linkedin.pptx
@@ -1517,6 +1517,10 @@
           </a:solidFill>
           <a:ln/>
         </p:spPr>
+        <p:txBody>
+          <a:bodyPr/>
+          <a:p/>
+        </p:txBody>
       </p:sp>
       <p:sp>
         <p:nvSpPr>
@@ -1537,6 +1541,10 @@
           </a:solidFill>
           <a:ln/>
         </p:spPr>
+        <p:txBody>
+          <a:bodyPr/>
+          <a:p/>
+        </p:txBody>
       </p:sp>
       <p:sp>
         <p:nvSpPr>
@@ -1557,6 +1565,10 @@
           </a:solidFill>
           <a:ln/>
         </p:spPr>
+        <p:txBody>
+          <a:bodyPr/>
+          <a:p/>
+        </p:txBody>
       </p:sp>
       <p:sp>
         <p:nvSpPr>
@@ -1749,6 +1761,10 @@
           </a:solidFill>
           <a:ln/>
         </p:spPr>
+        <p:txBody>
+          <a:bodyPr/>
+          <a:p/>
+        </p:txBody>
       </p:sp>
       <p:sp>
         <p:nvSpPr>
@@ -1889,6 +1905,10 @@
           </a:solidFill>
           <a:ln/>
         </p:spPr>
+        <p:txBody>
+          <a:bodyPr/>
+          <a:p/>
+        </p:txBody>
       </p:sp>
       <p:sp>
         <p:nvSpPr>
@@ -1909,6 +1929,10 @@
           </a:solidFill>
           <a:ln/>
         </p:spPr>
+        <p:txBody>
+          <a:bodyPr/>
+          <a:p/>
+        </p:txBody>
       </p:sp>
       <p:sp>
         <p:nvSpPr>
@@ -2010,6 +2034,10 @@
           </a:solidFill>
           <a:ln/>
         </p:spPr>
+        <p:txBody>
+          <a:bodyPr/>
+          <a:p/>
+        </p:txBody>
       </p:sp>
       <p:sp>
         <p:nvSpPr>
@@ -2030,6 +2058,10 @@
           </a:solidFill>
           <a:ln/>
         </p:spPr>
+        <p:txBody>
+          <a:bodyPr/>
+          <a:p/>
+        </p:txBody>
       </p:sp>
       <p:sp>
         <p:nvSpPr>
@@ -2131,6 +2163,10 @@
           </a:solidFill>
           <a:ln/>
         </p:spPr>
+        <p:txBody>
+          <a:bodyPr/>
+          <a:p/>
+        </p:txBody>
       </p:sp>
       <p:sp>
         <p:nvSpPr>
@@ -2151,6 +2187,10 @@
           </a:solidFill>
           <a:ln/>
         </p:spPr>
+        <p:txBody>
+          <a:bodyPr/>
+          <a:p/>
+        </p:txBody>
       </p:sp>
       <p:sp>
         <p:nvSpPr>
@@ -2266,7 +2306,7 @@
                 <a:ea typeface="Calibri" pitchFamily="34" charset="-122"/>
                 <a:cs typeface="Calibri" pitchFamily="34" charset="-120"/>
               </a:rPr>
-              <a:t>Networking is not schmoozing. It is staying genuinely connected.</a:t>
+              <a:t>Networking is not schmoozing. It is staying really connected.</a:t>
             </a:r>
             <a:endParaRPr lang="en-US" sz="1350" dirty="0"/>
           </a:p>
@@ -2323,6 +2363,10 @@
           </a:solidFill>
           <a:ln/>
         </p:spPr>
+        <p:txBody>
+          <a:bodyPr/>
+          <a:p/>
+        </p:txBody>
       </p:sp>
       <p:sp>
         <p:nvSpPr>
@@ -2475,6 +2519,10 @@
             </a:outerShdw>
           </a:effectLst>
         </p:spPr>
+        <p:txBody>
+          <a:bodyPr/>
+          <a:p/>
+        </p:txBody>
       </p:sp>
       <p:sp>
         <p:nvSpPr>
@@ -2495,6 +2543,10 @@
           </a:solidFill>
           <a:ln/>
         </p:spPr>
+        <p:txBody>
+          <a:bodyPr/>
+          <a:p/>
+        </p:txBody>
       </p:sp>
       <p:pic>
         <p:nvPicPr>
@@ -2632,6 +2684,10 @@
             </a:outerShdw>
           </a:effectLst>
         </p:spPr>
+        <p:txBody>
+          <a:bodyPr/>
+          <a:p/>
+        </p:txBody>
       </p:sp>
       <p:sp>
         <p:nvSpPr>
@@ -2652,6 +2708,10 @@
           </a:solidFill>
           <a:ln/>
         </p:spPr>
+        <p:txBody>
+          <a:bodyPr/>
+          <a:p/>
+        </p:txBody>
       </p:sp>
       <p:pic>
         <p:nvPicPr>
@@ -2789,6 +2849,10 @@
             </a:outerShdw>
           </a:effectLst>
         </p:spPr>
+        <p:txBody>
+          <a:bodyPr/>
+          <a:p/>
+        </p:txBody>
       </p:sp>
       <p:sp>
         <p:nvSpPr>
@@ -2809,6 +2873,10 @@
           </a:solidFill>
           <a:ln/>
         </p:spPr>
+        <p:txBody>
+          <a:bodyPr/>
+          <a:p/>
+        </p:txBody>
       </p:sp>
       <p:pic>
         <p:nvPicPr>
@@ -2946,6 +3014,10 @@
             </a:outerShdw>
           </a:effectLst>
         </p:spPr>
+        <p:txBody>
+          <a:bodyPr/>
+          <a:p/>
+        </p:txBody>
       </p:sp>
       <p:sp>
         <p:nvSpPr>
@@ -2966,6 +3038,10 @@
           </a:solidFill>
           <a:ln/>
         </p:spPr>
+        <p:txBody>
+          <a:bodyPr/>
+          <a:p/>
+        </p:txBody>
       </p:sp>
       <p:pic>
         <p:nvPicPr>
@@ -3123,6 +3199,10 @@
           </a:solidFill>
           <a:ln/>
         </p:spPr>
+        <p:txBody>
+          <a:bodyPr/>
+          <a:p/>
+        </p:txBody>
       </p:sp>
       <p:sp>
         <p:nvSpPr>
@@ -3275,6 +3355,10 @@
             </a:outerShdw>
           </a:effectLst>
         </p:spPr>
+        <p:txBody>
+          <a:bodyPr/>
+          <a:p/>
+        </p:txBody>
       </p:sp>
       <p:sp>
         <p:nvSpPr>
@@ -3295,6 +3379,10 @@
           </a:solidFill>
           <a:ln/>
         </p:spPr>
+        <p:txBody>
+          <a:bodyPr/>
+          <a:p/>
+        </p:txBody>
       </p:sp>
       <p:sp>
         <p:nvSpPr>
@@ -3315,6 +3403,10 @@
           </a:solidFill>
           <a:ln/>
         </p:spPr>
+        <p:txBody>
+          <a:bodyPr/>
+          <a:p/>
+        </p:txBody>
       </p:sp>
       <p:pic>
         <p:nvPicPr>
@@ -3494,6 +3586,10 @@
             </a:outerShdw>
           </a:effectLst>
         </p:spPr>
+        <p:txBody>
+          <a:bodyPr/>
+          <a:p/>
+        </p:txBody>
       </p:sp>
       <p:sp>
         <p:nvSpPr>
@@ -3514,6 +3610,10 @@
           </a:solidFill>
           <a:ln/>
         </p:spPr>
+        <p:txBody>
+          <a:bodyPr/>
+          <a:p/>
+        </p:txBody>
       </p:sp>
       <p:sp>
         <p:nvSpPr>
@@ -3534,6 +3634,10 @@
           </a:solidFill>
           <a:ln/>
         </p:spPr>
+        <p:txBody>
+          <a:bodyPr/>
+          <a:p/>
+        </p:txBody>
       </p:sp>
       <p:pic>
         <p:nvPicPr>
@@ -3733,6 +3837,10 @@
           </a:solidFill>
           <a:ln/>
         </p:spPr>
+        <p:txBody>
+          <a:bodyPr/>
+          <a:p/>
+        </p:txBody>
       </p:sp>
       <p:sp>
         <p:nvSpPr>
@@ -3885,6 +3993,10 @@
             </a:outerShdw>
           </a:effectLst>
         </p:spPr>
+        <p:txBody>
+          <a:bodyPr/>
+          <a:p/>
+        </p:txBody>
       </p:sp>
       <p:sp>
         <p:nvSpPr>
@@ -3905,6 +4017,10 @@
           </a:solidFill>
           <a:ln/>
         </p:spPr>
+        <p:txBody>
+          <a:bodyPr/>
+          <a:p/>
+        </p:txBody>
       </p:sp>
       <p:pic>
         <p:nvPicPr>
@@ -4042,6 +4158,10 @@
             </a:outerShdw>
           </a:effectLst>
         </p:spPr>
+        <p:txBody>
+          <a:bodyPr/>
+          <a:p/>
+        </p:txBody>
       </p:sp>
       <p:sp>
         <p:nvSpPr>
@@ -4062,6 +4182,10 @@
           </a:solidFill>
           <a:ln/>
         </p:spPr>
+        <p:txBody>
+          <a:bodyPr/>
+          <a:p/>
+        </p:txBody>
       </p:sp>
       <p:pic>
         <p:nvPicPr>
@@ -4199,6 +4323,10 @@
             </a:outerShdw>
           </a:effectLst>
         </p:spPr>
+        <p:txBody>
+          <a:bodyPr/>
+          <a:p/>
+        </p:txBody>
       </p:sp>
       <p:sp>
         <p:nvSpPr>
@@ -4219,6 +4347,10 @@
           </a:solidFill>
           <a:ln/>
         </p:spPr>
+        <p:txBody>
+          <a:bodyPr/>
+          <a:p/>
+        </p:txBody>
       </p:sp>
       <p:pic>
         <p:nvPicPr>
@@ -4376,6 +4508,10 @@
           </a:solidFill>
           <a:ln/>
         </p:spPr>
+        <p:txBody>
+          <a:bodyPr/>
+          <a:p/>
+        </p:txBody>
       </p:sp>
       <p:sp>
         <p:nvSpPr>
@@ -4528,6 +4664,10 @@
             </a:outerShdw>
           </a:effectLst>
         </p:spPr>
+        <p:txBody>
+          <a:bodyPr/>
+          <a:p/>
+        </p:txBody>
       </p:sp>
       <p:sp>
         <p:nvSpPr>
@@ -4548,6 +4688,10 @@
           </a:solidFill>
           <a:ln/>
         </p:spPr>
+        <p:txBody>
+          <a:bodyPr/>
+          <a:p/>
+        </p:txBody>
       </p:sp>
       <p:sp>
         <p:nvSpPr>
@@ -4568,6 +4712,10 @@
           </a:solidFill>
           <a:ln/>
         </p:spPr>
+        <p:txBody>
+          <a:bodyPr/>
+          <a:p/>
+        </p:txBody>
       </p:sp>
       <p:pic>
         <p:nvPicPr>
@@ -4747,6 +4895,10 @@
             </a:outerShdw>
           </a:effectLst>
         </p:spPr>
+        <p:txBody>
+          <a:bodyPr/>
+          <a:p/>
+        </p:txBody>
       </p:sp>
       <p:sp>
         <p:nvSpPr>
@@ -4767,6 +4919,10 @@
           </a:solidFill>
           <a:ln/>
         </p:spPr>
+        <p:txBody>
+          <a:bodyPr/>
+          <a:p/>
+        </p:txBody>
       </p:sp>
       <p:sp>
         <p:nvSpPr>
@@ -4787,6 +4943,10 @@
           </a:solidFill>
           <a:ln/>
         </p:spPr>
+        <p:txBody>
+          <a:bodyPr/>
+          <a:p/>
+        </p:txBody>
       </p:sp>
       <p:pic>
         <p:nvPicPr>
@@ -4986,6 +5146,10 @@
           </a:solidFill>
           <a:ln/>
         </p:spPr>
+        <p:txBody>
+          <a:bodyPr/>
+          <a:p/>
+        </p:txBody>
       </p:sp>
       <p:sp>
         <p:nvSpPr>
@@ -5138,6 +5302,10 @@
             </a:outerShdw>
           </a:effectLst>
         </p:spPr>
+        <p:txBody>
+          <a:bodyPr/>
+          <a:p/>
+        </p:txBody>
       </p:sp>
       <p:sp>
         <p:nvSpPr>
@@ -5158,6 +5326,10 @@
           </a:solidFill>
           <a:ln/>
         </p:spPr>
+        <p:txBody>
+          <a:bodyPr/>
+          <a:p/>
+        </p:txBody>
       </p:sp>
       <p:pic>
         <p:nvPicPr>
@@ -5295,6 +5467,10 @@
             </a:outerShdw>
           </a:effectLst>
         </p:spPr>
+        <p:txBody>
+          <a:bodyPr/>
+          <a:p/>
+        </p:txBody>
       </p:sp>
       <p:sp>
         <p:nvSpPr>
@@ -5315,6 +5491,10 @@
           </a:solidFill>
           <a:ln/>
         </p:spPr>
+        <p:txBody>
+          <a:bodyPr/>
+          <a:p/>
+        </p:txBody>
       </p:sp>
       <p:pic>
         <p:nvPicPr>
@@ -5452,6 +5632,10 @@
             </a:outerShdw>
           </a:effectLst>
         </p:spPr>
+        <p:txBody>
+          <a:bodyPr/>
+          <a:p/>
+        </p:txBody>
       </p:sp>
       <p:sp>
         <p:nvSpPr>
@@ -5472,6 +5656,10 @@
           </a:solidFill>
           <a:ln/>
         </p:spPr>
+        <p:txBody>
+          <a:bodyPr/>
+          <a:p/>
+        </p:txBody>
       </p:sp>
       <p:pic>
         <p:nvPicPr>
@@ -5629,6 +5817,10 @@
           </a:solidFill>
           <a:ln/>
         </p:spPr>
+        <p:txBody>
+          <a:bodyPr/>
+          <a:p/>
+        </p:txBody>
       </p:sp>
       <p:sp>
         <p:nvSpPr>
@@ -5649,6 +5841,10 @@
           </a:solidFill>
           <a:ln/>
         </p:spPr>
+        <p:txBody>
+          <a:bodyPr/>
+          <a:p/>
+        </p:txBody>
       </p:sp>
       <p:sp>
         <p:nvSpPr>
@@ -5669,6 +5865,10 @@
           </a:solidFill>
           <a:ln/>
         </p:spPr>
+        <p:txBody>
+          <a:bodyPr/>
+          <a:p/>
+        </p:txBody>
       </p:sp>
       <p:sp>
         <p:nvSpPr>
